--- a/tmp-tj/261029_dream-cosmetics_audit-reseaux-sociaux_v3.pptx
+++ b/tmp-tj/261029_dream-cosmetics_audit-reseaux-sociaux_v3.pptx
@@ -19704,7 +19704,7 @@
       </p:sp>
       <p:pic>
         <p:nvPicPr>
-          <p:cNvPr id="35" name="Picture 34" descr="CeraVe_Skincare_f48a478a5b.jpg"/>
+          <p:cNvPr id="35" name="Picture 34" descr="Vogue_France_with_Cl_4e1b81119f.jpg"/>
           <p:cNvPicPr>
             <a:picLocks noChangeAspect="1"/>
           </p:cNvPicPr>
@@ -19718,8 +19718,8 @@
         </p:blipFill>
         <p:spPr>
           <a:xfrm>
-            <a:off x="10008000" y="2327624"/>
-            <a:ext cx="1602000" cy="600750"/>
+            <a:off x="10008000" y="2176769"/>
+            <a:ext cx="1602000" cy="902460"/>
           </a:xfrm>
           <a:prstGeom prst="rect">
             <a:avLst/>
@@ -19760,7 +19760,7 @@
                 </a:solidFill>
                 <a:latin typeface="Poppins"/>
               </a:rPr>
-              <a:t>CeraVe</a:t>
+              <a:t>Clarins</a:t>
             </a:r>
           </a:p>
         </p:txBody>
@@ -19799,7 +19799,7 @@
                 </a:solidFill>
                 <a:latin typeface="Poppins"/>
               </a:rPr>
-              <a:t>Publicité Meta · 16/10/2026</a:t>
+              <a:t>Publicité Meta · 13/10/2026</a:t>
             </a:r>
           </a:p>
         </p:txBody>
@@ -19838,7 +19838,7 @@
                 </a:solidFill>
                 <a:latin typeface="Poppins"/>
               </a:rPr>
-              <a:t>Une vraie scène de famille, sans texte sur l’image.</a:t>
+              <a:t>Deux visages, une ambiance, aucun texte sur l’image.</a:t>
             </a:r>
           </a:p>
         </p:txBody>
@@ -20342,7 +20342,7 @@
                 </a:solidFill>
                 <a:latin typeface="Poppins"/>
               </a:rPr>
-              <a:t>Gandour · Bébé Switz</a:t>
+              <a:t>Gandour · Switz</a:t>
             </a:r>
           </a:p>
         </p:txBody>
@@ -20716,7 +20716,7 @@
                 </a:solidFill>
                 <a:latin typeface="Poppins"/>
               </a:rPr>
-              <a:t>Gandour · Feel cacao</a:t>
+              <a:t>Gandour · Feel</a:t>
             </a:r>
           </a:p>
         </p:txBody>
@@ -21316,7 +21316,7 @@
                 </a:solidFill>
                 <a:latin typeface="Poppins"/>
               </a:rPr>
-              <a:t>Publicité active · Nigeria, Kenya</a:t>
+              <a:t>Pub active · Nigeria, Kenya</a:t>
             </a:r>
           </a:p>
         </p:txBody>
@@ -21355,7 +21355,7 @@
                 </a:solidFill>
                 <a:latin typeface="Poppins"/>
               </a:rPr>
-              <a:t>Octobre Rose, en ligne depuis le 26/10 : une bonne image, mais aucun produit.</a:t>
+              <a:t>Octobre Rose, depuis le 26/10 : belle image, aucun produit.</a:t>
             </a:r>
           </a:p>
         </p:txBody>
@@ -23392,7 +23392,7 @@
                 </a:solidFill>
                 <a:latin typeface="Poppins"/>
               </a:rPr>
-              <a:t>Sur le modèle : Gandour Bébé Switz, CeraVe</a:t>
+              <a:t>Sur le modèle : Gandour Switz, Bioderma</a:t>
             </a:r>
           </a:p>
         </p:txBody>

--- a/tmp-tj/261029_dream-cosmetics_audit-reseaux-sociaux_v3.pptx
+++ b/tmp-tj/261029_dream-cosmetics_audit-reseaux-sociaux_v3.pptx
@@ -20381,7 +20381,7 @@
                 </a:solidFill>
                 <a:latin typeface="Poppins"/>
               </a:rPr>
-              <a:t>Facebook · 40 885 réactions</a:t>
+              <a:t>40 885 réactions</a:t>
             </a:r>
           </a:p>
         </p:txBody>
@@ -20568,7 +20568,7 @@
                 </a:solidFill>
                 <a:latin typeface="Poppins"/>
               </a:rPr>
-              <a:t>Facebook · 13 519 réactions</a:t>
+              <a:t>13 519 réactions</a:t>
             </a:r>
           </a:p>
         </p:txBody>
@@ -20755,7 +20755,7 @@
                 </a:solidFill>
                 <a:latin typeface="Poppins"/>
               </a:rPr>
-              <a:t>Facebook · 10 068 réactions</a:t>
+              <a:t>10 068 réactions</a:t>
             </a:r>
           </a:p>
         </p:txBody>
@@ -20942,7 +20942,7 @@
                 </a:solidFill>
                 <a:latin typeface="Poppins"/>
               </a:rPr>
-              <a:t>Facebook · 2 017 réactions</a:t>
+              <a:t>2 017 réactions</a:t>
             </a:r>
           </a:p>
         </p:txBody>
@@ -21129,7 +21129,7 @@
                 </a:solidFill>
                 <a:latin typeface="Poppins"/>
               </a:rPr>
-              <a:t>Facebook · 2 620 réactions</a:t>
+              <a:t>2 620 réactions</a:t>
             </a:r>
           </a:p>
         </p:txBody>
@@ -21464,7 +21464,7 @@
                 </a:solidFill>
                 <a:latin typeface="Poppins"/>
               </a:rPr>
-              <a:t>Les quatre meilleures publications du relevé africain font la même chose : un produit ou un bébé, une couleur, une phrase. Réactions relevées le 28/10/2026.</a:t>
+              <a:t>Les quatre meilleures publications du relevé africain font la même chose : un produit ou un bébé, une couleur, une phrase. Réactions Facebook relevées le 28/10/2026.</a:t>
             </a:r>
           </a:p>
         </p:txBody>
